--- a/python/Python_2_slides.pptx
+++ b/python/Python_2_slides.pptx
@@ -119,6 +119,96 @@
 </p:presentation>
 </file>
 
+<file path=ppt/revisionInfo.xml><?xml version="1.0" encoding="utf-8"?>
+<p1510:revInfo xmlns:a="http://schemas.openxmlformats.org/drawingml/2006/main" xmlns:r="http://schemas.openxmlformats.org/officeDocument/2006/relationships" xmlns:p1510="http://schemas.microsoft.com/office/powerpoint/2015/10/main">
+  <p1510:revLst>
+    <p1510:client id="{959ED8BD-BF51-4BB8-96C3-60CD4A4024F8}" v="9" dt="2025-10-03T08:50:44.158"/>
+  </p1510:revLst>
+</p1510:revInfo>
+</file>
+
+<file path=ppt/changesInfos/changesInfo1.xml><?xml version="1.0" encoding="utf-8"?>
+<pc:chgInfo xmlns:a="http://schemas.openxmlformats.org/drawingml/2006/main" xmlns:r="http://schemas.openxmlformats.org/officeDocument/2006/relationships" xmlns:ac="http://schemas.microsoft.com/office/drawing/2013/main/command" xmlns:pc="http://schemas.microsoft.com/office/powerpoint/2013/main/command">
+  <pc:docChgLst>
+    <pc:chgData name="Leila Iñigo de la Cruz" userId="fae4ed0d-52e1-4e8b-ac73-77e0b7235c9a" providerId="ADAL" clId="{959ED8BD-BF51-4BB8-96C3-60CD4A4024F8}"/>
+    <pc:docChg chg="custSel modSld">
+      <pc:chgData name="Leila Iñigo de la Cruz" userId="fae4ed0d-52e1-4e8b-ac73-77e0b7235c9a" providerId="ADAL" clId="{959ED8BD-BF51-4BB8-96C3-60CD4A4024F8}" dt="2025-10-03T09:08:47.612" v="130" actId="2711"/>
+      <pc:docMkLst>
+        <pc:docMk/>
+      </pc:docMkLst>
+      <pc:sldChg chg="addSp delSp modSp mod">
+        <pc:chgData name="Leila Iñigo de la Cruz" userId="fae4ed0d-52e1-4e8b-ac73-77e0b7235c9a" providerId="ADAL" clId="{959ED8BD-BF51-4BB8-96C3-60CD4A4024F8}" dt="2025-10-03T08:46:56.337" v="1" actId="478"/>
+        <pc:sldMkLst>
+          <pc:docMk/>
+          <pc:sldMk cId="2673622745" sldId="256"/>
+        </pc:sldMkLst>
+        <pc:spChg chg="add del mod">
+          <ac:chgData name="Leila Iñigo de la Cruz" userId="fae4ed0d-52e1-4e8b-ac73-77e0b7235c9a" providerId="ADAL" clId="{959ED8BD-BF51-4BB8-96C3-60CD4A4024F8}" dt="2025-10-03T08:46:56.337" v="1" actId="478"/>
+          <ac:spMkLst>
+            <pc:docMk/>
+            <pc:sldMk cId="2673622745" sldId="256"/>
+            <ac:spMk id="3" creationId="{DEC35312-FB59-53F4-51E6-08DCD19C29B0}"/>
+          </ac:spMkLst>
+        </pc:spChg>
+        <pc:spChg chg="del">
+          <ac:chgData name="Leila Iñigo de la Cruz" userId="fae4ed0d-52e1-4e8b-ac73-77e0b7235c9a" providerId="ADAL" clId="{959ED8BD-BF51-4BB8-96C3-60CD4A4024F8}" dt="2025-10-03T08:46:53.750" v="0" actId="478"/>
+          <ac:spMkLst>
+            <pc:docMk/>
+            <pc:sldMk cId="2673622745" sldId="256"/>
+            <ac:spMk id="5" creationId="{CCD88D82-8364-25B0-BFD4-FEEC827B6443}"/>
+          </ac:spMkLst>
+        </pc:spChg>
+      </pc:sldChg>
+      <pc:sldChg chg="modSp mod">
+        <pc:chgData name="Leila Iñigo de la Cruz" userId="fae4ed0d-52e1-4e8b-ac73-77e0b7235c9a" providerId="ADAL" clId="{959ED8BD-BF51-4BB8-96C3-60CD4A4024F8}" dt="2025-10-03T08:49:37.901" v="118" actId="20577"/>
+        <pc:sldMkLst>
+          <pc:docMk/>
+          <pc:sldMk cId="28071479" sldId="257"/>
+        </pc:sldMkLst>
+        <pc:spChg chg="mod">
+          <ac:chgData name="Leila Iñigo de la Cruz" userId="fae4ed0d-52e1-4e8b-ac73-77e0b7235c9a" providerId="ADAL" clId="{959ED8BD-BF51-4BB8-96C3-60CD4A4024F8}" dt="2025-10-03T08:49:37.901" v="118" actId="20577"/>
+          <ac:spMkLst>
+            <pc:docMk/>
+            <pc:sldMk cId="28071479" sldId="257"/>
+            <ac:spMk id="4" creationId="{1D8F599F-40C8-714B-F33A-BDD8FDCCE4BB}"/>
+          </ac:spMkLst>
+        </pc:spChg>
+      </pc:sldChg>
+      <pc:sldChg chg="modSp mod modAnim">
+        <pc:chgData name="Leila Iñigo de la Cruz" userId="fae4ed0d-52e1-4e8b-ac73-77e0b7235c9a" providerId="ADAL" clId="{959ED8BD-BF51-4BB8-96C3-60CD4A4024F8}" dt="2025-10-03T08:50:44.158" v="129"/>
+        <pc:sldMkLst>
+          <pc:docMk/>
+          <pc:sldMk cId="4232634174" sldId="259"/>
+        </pc:sldMkLst>
+        <pc:spChg chg="mod">
+          <ac:chgData name="Leila Iñigo de la Cruz" userId="fae4ed0d-52e1-4e8b-ac73-77e0b7235c9a" providerId="ADAL" clId="{959ED8BD-BF51-4BB8-96C3-60CD4A4024F8}" dt="2025-10-03T08:50:26.016" v="128" actId="13926"/>
+          <ac:spMkLst>
+            <pc:docMk/>
+            <pc:sldMk cId="4232634174" sldId="259"/>
+            <ac:spMk id="3" creationId="{7B473C41-CD9D-77F7-38C0-2A47ECF58844}"/>
+          </ac:spMkLst>
+        </pc:spChg>
+      </pc:sldChg>
+      <pc:sldChg chg="modSp mod">
+        <pc:chgData name="Leila Iñigo de la Cruz" userId="fae4ed0d-52e1-4e8b-ac73-77e0b7235c9a" providerId="ADAL" clId="{959ED8BD-BF51-4BB8-96C3-60CD4A4024F8}" dt="2025-10-03T09:08:47.612" v="130" actId="2711"/>
+        <pc:sldMkLst>
+          <pc:docMk/>
+          <pc:sldMk cId="612406261" sldId="262"/>
+        </pc:sldMkLst>
+        <pc:spChg chg="mod">
+          <ac:chgData name="Leila Iñigo de la Cruz" userId="fae4ed0d-52e1-4e8b-ac73-77e0b7235c9a" providerId="ADAL" clId="{959ED8BD-BF51-4BB8-96C3-60CD4A4024F8}" dt="2025-10-03T09:08:47.612" v="130" actId="2711"/>
+          <ac:spMkLst>
+            <pc:docMk/>
+            <pc:sldMk cId="612406261" sldId="262"/>
+            <ac:spMk id="3" creationId="{329891ED-140E-455B-F300-7F061F7BCA4B}"/>
+          </ac:spMkLst>
+        </pc:spChg>
+      </pc:sldChg>
+    </pc:docChg>
+  </pc:docChgLst>
+</pc:chgInfo>
+</file>
+
 <file path=ppt/slideLayouts/slideLayout1.xml><?xml version="1.0" encoding="utf-8"?>
 <p:sldLayout xmlns:a="http://schemas.openxmlformats.org/drawingml/2006/main" xmlns:r="http://schemas.openxmlformats.org/officeDocument/2006/relationships" xmlns:p="http://schemas.openxmlformats.org/presentationml/2006/main" type="title" preserve="1">
   <p:cSld name="Title Slide">
@@ -268,7 +358,7 @@
           <a:p>
             <a:fld id="{816D45CC-B4D8-421A-80A3-565CB046D52F}" type="datetimeFigureOut">
               <a:rPr lang="en-GB" smtClean="0"/>
-              <a:t>23/10/2024</a:t>
+              <a:t>03/10/2025</a:t>
             </a:fld>
             <a:endParaRPr lang="en-GB"/>
           </a:p>
@@ -468,7 +558,7 @@
           <a:p>
             <a:fld id="{816D45CC-B4D8-421A-80A3-565CB046D52F}" type="datetimeFigureOut">
               <a:rPr lang="en-GB" smtClean="0"/>
-              <a:t>23/10/2024</a:t>
+              <a:t>03/10/2025</a:t>
             </a:fld>
             <a:endParaRPr lang="en-GB"/>
           </a:p>
@@ -678,7 +768,7 @@
           <a:p>
             <a:fld id="{816D45CC-B4D8-421A-80A3-565CB046D52F}" type="datetimeFigureOut">
               <a:rPr lang="en-GB" smtClean="0"/>
-              <a:t>23/10/2024</a:t>
+              <a:t>03/10/2025</a:t>
             </a:fld>
             <a:endParaRPr lang="en-GB"/>
           </a:p>
@@ -878,7 +968,7 @@
           <a:p>
             <a:fld id="{816D45CC-B4D8-421A-80A3-565CB046D52F}" type="datetimeFigureOut">
               <a:rPr lang="en-GB" smtClean="0"/>
-              <a:t>23/10/2024</a:t>
+              <a:t>03/10/2025</a:t>
             </a:fld>
             <a:endParaRPr lang="en-GB"/>
           </a:p>
@@ -1154,7 +1244,7 @@
           <a:p>
             <a:fld id="{816D45CC-B4D8-421A-80A3-565CB046D52F}" type="datetimeFigureOut">
               <a:rPr lang="en-GB" smtClean="0"/>
-              <a:t>23/10/2024</a:t>
+              <a:t>03/10/2025</a:t>
             </a:fld>
             <a:endParaRPr lang="en-GB"/>
           </a:p>
@@ -1422,7 +1512,7 @@
           <a:p>
             <a:fld id="{816D45CC-B4D8-421A-80A3-565CB046D52F}" type="datetimeFigureOut">
               <a:rPr lang="en-GB" smtClean="0"/>
-              <a:t>23/10/2024</a:t>
+              <a:t>03/10/2025</a:t>
             </a:fld>
             <a:endParaRPr lang="en-GB"/>
           </a:p>
@@ -1837,7 +1927,7 @@
           <a:p>
             <a:fld id="{816D45CC-B4D8-421A-80A3-565CB046D52F}" type="datetimeFigureOut">
               <a:rPr lang="en-GB" smtClean="0"/>
-              <a:t>23/10/2024</a:t>
+              <a:t>03/10/2025</a:t>
             </a:fld>
             <a:endParaRPr lang="en-GB"/>
           </a:p>
@@ -1979,7 +2069,7 @@
           <a:p>
             <a:fld id="{816D45CC-B4D8-421A-80A3-565CB046D52F}" type="datetimeFigureOut">
               <a:rPr lang="en-GB" smtClean="0"/>
-              <a:t>23/10/2024</a:t>
+              <a:t>03/10/2025</a:t>
             </a:fld>
             <a:endParaRPr lang="en-GB"/>
           </a:p>
@@ -2092,7 +2182,7 @@
           <a:p>
             <a:fld id="{816D45CC-B4D8-421A-80A3-565CB046D52F}" type="datetimeFigureOut">
               <a:rPr lang="en-GB" smtClean="0"/>
-              <a:t>23/10/2024</a:t>
+              <a:t>03/10/2025</a:t>
             </a:fld>
             <a:endParaRPr lang="en-GB"/>
           </a:p>
@@ -2405,7 +2495,7 @@
           <a:p>
             <a:fld id="{816D45CC-B4D8-421A-80A3-565CB046D52F}" type="datetimeFigureOut">
               <a:rPr lang="en-GB" smtClean="0"/>
-              <a:t>23/10/2024</a:t>
+              <a:t>03/10/2025</a:t>
             </a:fld>
             <a:endParaRPr lang="en-GB"/>
           </a:p>
@@ -2694,7 +2784,7 @@
           <a:p>
             <a:fld id="{816D45CC-B4D8-421A-80A3-565CB046D52F}" type="datetimeFigureOut">
               <a:rPr lang="en-GB" smtClean="0"/>
-              <a:t>23/10/2024</a:t>
+              <a:t>03/10/2025</a:t>
             </a:fld>
             <a:endParaRPr lang="en-GB"/>
           </a:p>
@@ -2937,7 +3027,7 @@
           <a:p>
             <a:fld id="{816D45CC-B4D8-421A-80A3-565CB046D52F}" type="datetimeFigureOut">
               <a:rPr lang="en-GB" smtClean="0"/>
-              <a:t>23/10/2024</a:t>
+              <a:t>03/10/2025</a:t>
             </a:fld>
             <a:endParaRPr lang="en-GB"/>
           </a:p>
@@ -3382,53 +3472,6 @@
           </a:p>
         </p:txBody>
       </p:sp>
-      <p:sp>
-        <p:nvSpPr>
-          <p:cNvPr id="5" name="Subtitle 4">
-            <a:extLst>
-              <a:ext uri="{FF2B5EF4-FFF2-40B4-BE49-F238E27FC236}">
-                <a16:creationId xmlns:a16="http://schemas.microsoft.com/office/drawing/2014/main" id="{CCD88D82-8364-25B0-BFD4-FEEC827B6443}"/>
-              </a:ext>
-            </a:extLst>
-          </p:cNvPr>
-          <p:cNvSpPr>
-            <a:spLocks noGrp="1"/>
-          </p:cNvSpPr>
-          <p:nvPr>
-            <p:ph type="subTitle" idx="1"/>
-          </p:nvPr>
-        </p:nvSpPr>
-        <p:spPr>
-          <a:xfrm>
-            <a:off x="1524000" y="4025544"/>
-            <a:ext cx="9144000" cy="1655762"/>
-          </a:xfrm>
-        </p:spPr>
-        <p:txBody>
-          <a:bodyPr>
-            <a:normAutofit/>
-          </a:bodyPr>
-          <a:lstStyle/>
-          <a:p>
-            <a:r>
-              <a:rPr lang="en-GB" sz="2800" dirty="0"/>
-              <a:t>Instructor: Leila Iñigo</a:t>
-            </a:r>
-          </a:p>
-          <a:p>
-            <a:r>
-              <a:rPr lang="en-GB" sz="2800" dirty="0"/>
-              <a:t>Role: Trainer of Digital skills from 4TU.ResearchData</a:t>
-            </a:r>
-          </a:p>
-          <a:p>
-            <a:r>
-              <a:rPr lang="en-GB" sz="2800" dirty="0"/>
-              <a:t>Helpers: </a:t>
-            </a:r>
-          </a:p>
-        </p:txBody>
-      </p:sp>
     </p:spTree>
     <p:extLst>
       <p:ext uri="{BB962C8B-B14F-4D97-AF65-F5344CB8AC3E}">
@@ -3993,7 +4036,7 @@
               <a:rPr lang="en-US" sz="1400" b="0" dirty="0">
                 <a:effectLst/>
               </a:rPr>
-              <a:t>11:00 – Reusability/Modular coding/Documentation </a:t>
+              <a:t>11:00 – Reusability/Modular coding/Documentation</a:t>
             </a:r>
           </a:p>
           <a:p>
@@ -4008,11 +4051,56 @@
               <a:buChar char="•"/>
             </a:pPr>
             <a:r>
-              <a:rPr lang="en-US" sz="1400" b="1" dirty="0">
+              <a:rPr lang="en-US" sz="1400" dirty="0"/>
+              <a:t>11:15- Errors and exceptions</a:t>
+            </a:r>
+            <a:r>
+              <a:rPr lang="en-US" sz="1400" b="0" dirty="0">
                 <a:effectLst/>
               </a:rPr>
-              <a:t>11:30 - Exercise 2 </a:t>
-            </a:r>
+              <a:t> </a:t>
+            </a:r>
+          </a:p>
+          <a:p>
+            <a:pPr indent="-228600">
+              <a:lnSpc>
+                <a:spcPct val="90000"/>
+              </a:lnSpc>
+              <a:spcAft>
+                <a:spcPts val="600"/>
+              </a:spcAft>
+              <a:buFont typeface="Arial" panose="020B0604020202020204" pitchFamily="34" charset="0"/>
+              <a:buChar char="•"/>
+            </a:pPr>
+            <a:r>
+              <a:rPr lang="en-US" sz="1400" dirty="0"/>
+              <a:t>11:30- Defensive programming</a:t>
+            </a:r>
+          </a:p>
+          <a:p>
+            <a:pPr indent="-228600">
+              <a:lnSpc>
+                <a:spcPct val="90000"/>
+              </a:lnSpc>
+              <a:spcAft>
+                <a:spcPts val="600"/>
+              </a:spcAft>
+              <a:buFont typeface="Arial" panose="020B0604020202020204" pitchFamily="34" charset="0"/>
+              <a:buChar char="•"/>
+            </a:pPr>
+            <a:r>
+              <a:rPr lang="en-US" sz="1400" b="0" dirty="0">
+                <a:effectLst/>
+              </a:rPr>
+              <a:t>12:00 C</a:t>
+            </a:r>
+            <a:r>
+              <a:rPr lang="en-US" sz="1400" dirty="0"/>
+              <a:t>ommand line programs</a:t>
+            </a:r>
+            <a:endParaRPr lang="en-US" sz="1400" b="0" dirty="0">
+              <a:effectLst/>
+            </a:endParaRPr>
           </a:p>
           <a:p>
             <a:pPr>
@@ -4032,92 +4120,13 @@
               <a:rPr lang="en-US" sz="1400" b="1" dirty="0">
                 <a:effectLst/>
               </a:rPr>
-              <a:t>12:00 – Lunch</a:t>
-            </a:r>
-          </a:p>
-          <a:p>
-            <a:pPr>
-              <a:lnSpc>
-                <a:spcPct val="90000"/>
-              </a:lnSpc>
-              <a:spcAft>
-                <a:spcPts val="600"/>
-              </a:spcAft>
-            </a:pPr>
-            <a:endParaRPr lang="en-US" sz="1400" b="0" dirty="0">
-              <a:effectLst/>
-            </a:endParaRPr>
-          </a:p>
-          <a:p>
-            <a:pPr marL="171450" indent="-171450">
-              <a:lnSpc>
-                <a:spcPct val="90000"/>
-              </a:lnSpc>
-              <a:spcAft>
-                <a:spcPts val="600"/>
-              </a:spcAft>
-              <a:buFont typeface="Arial" panose="020B0604020202020204" pitchFamily="34" charset="0"/>
-              <a:buChar char="•"/>
-            </a:pPr>
+              <a:t>12:30 – Lunch</a:t>
+            </a:r>
             <a:r>
               <a:rPr lang="en-US" sz="1400" b="0" dirty="0">
                 <a:effectLst/>
               </a:rPr>
-              <a:t>12:30 – Errors and exceptions</a:t>
-            </a:r>
-          </a:p>
-          <a:p>
-            <a:pPr indent="-228600">
-              <a:lnSpc>
-                <a:spcPct val="90000"/>
-              </a:lnSpc>
-              <a:spcAft>
-                <a:spcPts val="600"/>
-              </a:spcAft>
-              <a:buFont typeface="Arial" panose="020B0604020202020204" pitchFamily="34" charset="0"/>
-              <a:buChar char="•"/>
-            </a:pPr>
-            <a:r>
-              <a:rPr lang="en-US" sz="1400" b="0" dirty="0">
-                <a:effectLst/>
-              </a:rPr>
-              <a:t>12:45 – Defensive programming  </a:t>
-            </a:r>
-          </a:p>
-          <a:p>
-            <a:pPr indent="-228600">
-              <a:lnSpc>
-                <a:spcPct val="90000"/>
-              </a:lnSpc>
-              <a:spcAft>
-                <a:spcPts val="600"/>
-              </a:spcAft>
-              <a:buFont typeface="Arial" panose="020B0604020202020204" pitchFamily="34" charset="0"/>
-              <a:buChar char="•"/>
-            </a:pPr>
-            <a:r>
-              <a:rPr lang="en-US" sz="1400" b="0" dirty="0">
-                <a:effectLst/>
-              </a:rPr>
-              <a:t>13:00 – Command Line programs </a:t>
-            </a:r>
-          </a:p>
-          <a:p>
-            <a:pPr indent="-228600">
-              <a:lnSpc>
-                <a:spcPct val="90000"/>
-              </a:lnSpc>
-              <a:spcAft>
-                <a:spcPts val="600"/>
-              </a:spcAft>
-              <a:buFont typeface="Arial" panose="020B0604020202020204" pitchFamily="34" charset="0"/>
-              <a:buChar char="•"/>
-            </a:pPr>
-            <a:r>
-              <a:rPr lang="en-US" sz="1400" b="0" dirty="0">
-                <a:effectLst/>
-              </a:rPr>
-              <a:t>13:20 - Wrap up  </a:t>
+              <a:t>  </a:t>
             </a:r>
           </a:p>
         </p:txBody>
@@ -7309,13 +7318,13 @@
         </p:nvSpPr>
         <p:spPr>
           <a:xfrm>
-            <a:off x="1115568" y="2481943"/>
-            <a:ext cx="10168128" cy="3695020"/>
+            <a:off x="768096" y="2445366"/>
+            <a:ext cx="10168128" cy="3992009"/>
           </a:xfrm>
         </p:spPr>
         <p:txBody>
           <a:bodyPr>
-            <a:normAutofit/>
+            <a:noAutofit/>
           </a:bodyPr>
           <a:lstStyle/>
           <a:p>
@@ -7323,9 +7332,10 @@
               <a:buNone/>
             </a:pPr>
             <a:r>
-              <a:rPr lang="en-US" sz="1200" b="1" dirty="0">
+              <a:rPr lang="en-US" sz="1400" b="1" dirty="0">
                 <a:effectLst/>
-                <a:latin typeface="Consolas" panose="020B0609020204030204" pitchFamily="49" charset="0"/>
+                <a:latin typeface="Arial" panose="020B0604020202020204" pitchFamily="34" charset="0"/>
+                <a:cs typeface="Arial" panose="020B0604020202020204" pitchFamily="34" charset="0"/>
               </a:rPr>
               <a:t>Goal: Analysis inflammation data</a:t>
             </a:r>
@@ -7334,85 +7344,96 @@
             <a:pPr marL="0" indent="0">
               <a:buNone/>
             </a:pPr>
-            <a:endParaRPr lang="en-US" sz="1200" b="0" dirty="0">
+            <a:endParaRPr lang="en-US" sz="1400" b="0" dirty="0">
               <a:effectLst/>
-              <a:latin typeface="Consolas" panose="020B0609020204030204" pitchFamily="49" charset="0"/>
+              <a:latin typeface="Arial" panose="020B0604020202020204" pitchFamily="34" charset="0"/>
+              <a:cs typeface="Arial" panose="020B0604020202020204" pitchFamily="34" charset="0"/>
             </a:endParaRPr>
           </a:p>
           <a:p>
             <a:r>
-              <a:rPr lang="en-US" sz="1200" b="0" dirty="0">
+              <a:rPr lang="en-US" sz="1400" b="0" dirty="0">
                 <a:effectLst/>
-                <a:latin typeface="Consolas" panose="020B0609020204030204" pitchFamily="49" charset="0"/>
+                <a:latin typeface="Arial" panose="020B0604020202020204" pitchFamily="34" charset="0"/>
+                <a:cs typeface="Arial" panose="020B0604020202020204" pitchFamily="34" charset="0"/>
               </a:rPr>
               <a:t>Python fundamentals on variables and lists</a:t>
             </a:r>
           </a:p>
           <a:p>
             <a:r>
-              <a:rPr lang="en-US" sz="1200" b="0" dirty="0">
+              <a:rPr lang="en-US" sz="1400" b="0" dirty="0">
                 <a:effectLst/>
-                <a:latin typeface="Consolas" panose="020B0609020204030204" pitchFamily="49" charset="0"/>
+                <a:latin typeface="Arial" panose="020B0604020202020204" pitchFamily="34" charset="0"/>
+                <a:cs typeface="Arial" panose="020B0604020202020204" pitchFamily="34" charset="0"/>
               </a:rPr>
               <a:t>Import and </a:t>
             </a:r>
             <a:r>
-              <a:rPr lang="en-US" sz="1200" b="0" dirty="0" err="1">
+              <a:rPr lang="en-US" sz="1400" b="0" dirty="0" err="1">
                 <a:effectLst/>
-                <a:latin typeface="Consolas" panose="020B0609020204030204" pitchFamily="49" charset="0"/>
+                <a:latin typeface="Arial" panose="020B0604020202020204" pitchFamily="34" charset="0"/>
+                <a:cs typeface="Arial" panose="020B0604020202020204" pitchFamily="34" charset="0"/>
               </a:rPr>
               <a:t>analyse</a:t>
             </a:r>
             <a:r>
-              <a:rPr lang="en-US" sz="1200" b="0" dirty="0">
+              <a:rPr lang="en-US" sz="1400" b="0" dirty="0">
                 <a:effectLst/>
-                <a:latin typeface="Consolas" panose="020B0609020204030204" pitchFamily="49" charset="0"/>
+                <a:latin typeface="Arial" panose="020B0604020202020204" pitchFamily="34" charset="0"/>
+                <a:cs typeface="Arial" panose="020B0604020202020204" pitchFamily="34" charset="0"/>
               </a:rPr>
               <a:t> data with `</a:t>
             </a:r>
             <a:r>
-              <a:rPr lang="en-US" sz="1200" b="0" dirty="0" err="1">
+              <a:rPr lang="en-US" sz="1400" b="0" dirty="0" err="1">
                 <a:effectLst/>
-                <a:latin typeface="Consolas" panose="020B0609020204030204" pitchFamily="49" charset="0"/>
+                <a:latin typeface="Arial" panose="020B0604020202020204" pitchFamily="34" charset="0"/>
+                <a:cs typeface="Arial" panose="020B0604020202020204" pitchFamily="34" charset="0"/>
               </a:rPr>
               <a:t>numpy</a:t>
             </a:r>
             <a:r>
-              <a:rPr lang="en-US" sz="1200" b="0" dirty="0">
+              <a:rPr lang="en-US" sz="1400" b="0" dirty="0">
                 <a:effectLst/>
-                <a:latin typeface="Consolas" panose="020B0609020204030204" pitchFamily="49" charset="0"/>
+                <a:latin typeface="Arial" panose="020B0604020202020204" pitchFamily="34" charset="0"/>
+                <a:cs typeface="Arial" panose="020B0604020202020204" pitchFamily="34" charset="0"/>
               </a:rPr>
               <a:t>`</a:t>
             </a:r>
           </a:p>
           <a:p>
             <a:r>
-              <a:rPr lang="en-US" sz="1200" b="0" dirty="0">
+              <a:rPr lang="en-US" sz="1400" b="0" dirty="0">
                 <a:effectLst/>
-                <a:latin typeface="Consolas" panose="020B0609020204030204" pitchFamily="49" charset="0"/>
+                <a:latin typeface="Arial" panose="020B0604020202020204" pitchFamily="34" charset="0"/>
+                <a:cs typeface="Arial" panose="020B0604020202020204" pitchFamily="34" charset="0"/>
               </a:rPr>
               <a:t>Create figure with subplots using `</a:t>
             </a:r>
             <a:r>
-              <a:rPr lang="en-US" sz="1200" b="0" dirty="0" err="1">
+              <a:rPr lang="en-US" sz="1400" b="0" dirty="0" err="1">
                 <a:effectLst/>
-                <a:latin typeface="Consolas" panose="020B0609020204030204" pitchFamily="49" charset="0"/>
+                <a:latin typeface="Arial" panose="020B0604020202020204" pitchFamily="34" charset="0"/>
+                <a:cs typeface="Arial" panose="020B0604020202020204" pitchFamily="34" charset="0"/>
               </a:rPr>
               <a:t>matplotlib.pyplot</a:t>
             </a:r>
             <a:r>
-              <a:rPr lang="en-US" sz="1200" b="0" dirty="0">
+              <a:rPr lang="en-US" sz="1400" b="0" dirty="0">
                 <a:effectLst/>
-                <a:latin typeface="Consolas" panose="020B0609020204030204" pitchFamily="49" charset="0"/>
+                <a:latin typeface="Arial" panose="020B0604020202020204" pitchFamily="34" charset="0"/>
+                <a:cs typeface="Arial" panose="020B0604020202020204" pitchFamily="34" charset="0"/>
               </a:rPr>
               <a:t>`</a:t>
             </a:r>
           </a:p>
           <a:p>
             <a:r>
-              <a:rPr lang="en-US" sz="1200" b="0" dirty="0">
+              <a:rPr lang="en-US" sz="1400" b="0" dirty="0">
                 <a:effectLst/>
-                <a:latin typeface="Consolas" panose="020B0609020204030204" pitchFamily="49" charset="0"/>
+                <a:latin typeface="Arial" panose="020B0604020202020204" pitchFamily="34" charset="0"/>
+                <a:cs typeface="Arial" panose="020B0604020202020204" pitchFamily="34" charset="0"/>
               </a:rPr>
               <a:t>Repeat analysis in a for-loop together with `glob`</a:t>
             </a:r>
@@ -7421,8 +7442,9 @@
             <a:pPr marL="0" indent="0">
               <a:buNone/>
             </a:pPr>
-            <a:endParaRPr lang="en-US" sz="1200" dirty="0">
-              <a:latin typeface="Consolas" panose="020B0609020204030204" pitchFamily="49" charset="0"/>
+            <a:endParaRPr lang="en-US" sz="1400" dirty="0">
+              <a:latin typeface="Arial" panose="020B0604020202020204" pitchFamily="34" charset="0"/>
+              <a:cs typeface="Arial" panose="020B0604020202020204" pitchFamily="34" charset="0"/>
             </a:endParaRPr>
           </a:p>
           <a:p>
@@ -7433,78 +7455,92 @@
               <a:buNone/>
             </a:pPr>
             <a:br>
-              <a:rPr lang="en-US" sz="1200" b="0" dirty="0">
+              <a:rPr lang="en-US" sz="1400" b="0" dirty="0">
                 <a:effectLst/>
-                <a:latin typeface="Consolas" panose="020B0609020204030204" pitchFamily="49" charset="0"/>
+                <a:latin typeface="Arial" panose="020B0604020202020204" pitchFamily="34" charset="0"/>
+                <a:cs typeface="Arial" panose="020B0604020202020204" pitchFamily="34" charset="0"/>
               </a:rPr>
             </a:br>
             <a:r>
-              <a:rPr lang="en-US" sz="1200" dirty="0">
-                <a:latin typeface="+mj-lt"/>
+              <a:rPr lang="en-US" dirty="0">
+                <a:highlight>
+                  <a:srgbClr val="FFFF00"/>
+                </a:highlight>
+                <a:latin typeface="Arial" panose="020B0604020202020204" pitchFamily="34" charset="0"/>
                 <a:ea typeface="+mj-ea"/>
-                <a:cs typeface="+mj-cs"/>
+                <a:cs typeface="Arial" panose="020B0604020202020204" pitchFamily="34" charset="0"/>
               </a:rPr>
               <a:t>Today</a:t>
             </a:r>
           </a:p>
           <a:p>
             <a:r>
-              <a:rPr lang="en-US" sz="1200" b="1" dirty="0">
+              <a:rPr lang="en-US" sz="1400" b="1" dirty="0">
                 <a:effectLst/>
-                <a:latin typeface="Consolas" panose="020B0609020204030204" pitchFamily="49" charset="0"/>
+                <a:latin typeface="Arial" panose="020B0604020202020204" pitchFamily="34" charset="0"/>
+                <a:cs typeface="Arial" panose="020B0604020202020204" pitchFamily="34" charset="0"/>
               </a:rPr>
               <a:t>Catch suspicious datasets with conditional statements</a:t>
             </a:r>
           </a:p>
           <a:p>
             <a:r>
-              <a:rPr lang="en-US" sz="1200" b="1" dirty="0">
+              <a:rPr lang="en-US" sz="1400" b="1" dirty="0">
                 <a:effectLst/>
-                <a:latin typeface="Consolas" panose="020B0609020204030204" pitchFamily="49" charset="0"/>
+                <a:latin typeface="Arial" panose="020B0604020202020204" pitchFamily="34" charset="0"/>
+                <a:cs typeface="Arial" panose="020B0604020202020204" pitchFamily="34" charset="0"/>
               </a:rPr>
               <a:t>Create reusable function(s) with the analysis</a:t>
             </a:r>
           </a:p>
           <a:p>
             <a:r>
-              <a:rPr lang="en-US" sz="1200" b="1" dirty="0">
+              <a:rPr lang="en-US" sz="1400" b="1" dirty="0">
                 <a:effectLst/>
-                <a:latin typeface="Consolas" panose="020B0609020204030204" pitchFamily="49" charset="0"/>
+                <a:latin typeface="Arial" panose="020B0604020202020204" pitchFamily="34" charset="0"/>
+                <a:cs typeface="Arial" panose="020B0604020202020204" pitchFamily="34" charset="0"/>
               </a:rPr>
               <a:t>Understand errors</a:t>
             </a:r>
           </a:p>
           <a:p>
             <a:r>
-              <a:rPr lang="en-US" sz="1200" b="1" dirty="0">
+              <a:rPr lang="en-US" sz="1400" b="1" dirty="0">
                 <a:effectLst/>
-                <a:latin typeface="Consolas" panose="020B0609020204030204" pitchFamily="49" charset="0"/>
+                <a:latin typeface="Arial" panose="020B0604020202020204" pitchFamily="34" charset="0"/>
+                <a:cs typeface="Arial" panose="020B0604020202020204" pitchFamily="34" charset="0"/>
               </a:rPr>
               <a:t>Run python in the command line (</a:t>
             </a:r>
             <a:r>
-              <a:rPr lang="en-US" sz="1200" b="1" dirty="0" err="1">
+              <a:rPr lang="en-US" sz="1400" b="1" dirty="0" err="1">
                 <a:effectLst/>
-                <a:latin typeface="Consolas" panose="020B0609020204030204" pitchFamily="49" charset="0"/>
+                <a:latin typeface="Arial" panose="020B0604020202020204" pitchFamily="34" charset="0"/>
+                <a:cs typeface="Arial" panose="020B0604020202020204" pitchFamily="34" charset="0"/>
               </a:rPr>
               <a:t>unix</a:t>
             </a:r>
             <a:r>
-              <a:rPr lang="en-US" sz="1200" b="1" dirty="0">
-                <a:latin typeface="Consolas" panose="020B0609020204030204" pitchFamily="49" charset="0"/>
+              <a:rPr lang="en-US" sz="1400" b="1" dirty="0">
+                <a:latin typeface="Arial" panose="020B0604020202020204" pitchFamily="34" charset="0"/>
+                <a:cs typeface="Arial" panose="020B0604020202020204" pitchFamily="34" charset="0"/>
               </a:rPr>
               <a:t> shell</a:t>
             </a:r>
             <a:r>
-              <a:rPr lang="en-US" sz="1200" b="1" dirty="0">
+              <a:rPr lang="en-US" sz="1400" b="1" dirty="0">
                 <a:effectLst/>
-                <a:latin typeface="Consolas" panose="020B0609020204030204" pitchFamily="49" charset="0"/>
+                <a:latin typeface="Arial" panose="020B0604020202020204" pitchFamily="34" charset="0"/>
+                <a:cs typeface="Arial" panose="020B0604020202020204" pitchFamily="34" charset="0"/>
               </a:rPr>
               <a:t>)</a:t>
             </a:r>
           </a:p>
           <a:p>
-            <a:endParaRPr lang="en-GB" sz="1200" dirty="0"/>
+            <a:endParaRPr lang="en-GB" sz="1400" dirty="0">
+              <a:latin typeface="Arial" panose="020B0604020202020204" pitchFamily="34" charset="0"/>
+              <a:cs typeface="Arial" panose="020B0604020202020204" pitchFamily="34" charset="0"/>
+            </a:endParaRPr>
           </a:p>
         </p:txBody>
       </p:sp>
@@ -9236,51 +9272,75 @@
           <a:lstStyle/>
           <a:p>
             <a:r>
-              <a:rPr lang="en-US" sz="2200" b="0">
+              <a:rPr lang="en-US" sz="2200" b="0" dirty="0">
                 <a:effectLst/>
-                <a:latin typeface="Consolas" panose="020B0609020204030204" pitchFamily="49" charset="0"/>
+                <a:latin typeface="Arial" panose="020B0604020202020204" pitchFamily="34" charset="0"/>
+                <a:cs typeface="Arial" panose="020B0604020202020204" pitchFamily="34" charset="0"/>
               </a:rPr>
               <a:t> Program defensively, i.e., assume that errors are going to arise, and write code to detect them when they do.</a:t>
             </a:r>
           </a:p>
           <a:p>
             <a:r>
-              <a:rPr lang="en-US" sz="2200" b="0">
+              <a:rPr lang="en-US" sz="2200" b="0" dirty="0">
                 <a:effectLst/>
-                <a:latin typeface="Consolas" panose="020B0609020204030204" pitchFamily="49" charset="0"/>
+                <a:latin typeface="Arial" panose="020B0604020202020204" pitchFamily="34" charset="0"/>
+                <a:cs typeface="Arial" panose="020B0604020202020204" pitchFamily="34" charset="0"/>
               </a:rPr>
               <a:t>Put assertions in programs to check their state as they run, and to help readers understand how those programs are supposed to work.</a:t>
             </a:r>
           </a:p>
           <a:p>
             <a:r>
-              <a:rPr lang="en-US" sz="2200" b="0">
+              <a:rPr lang="en-US" sz="2200" b="0" dirty="0">
                 <a:effectLst/>
-                <a:latin typeface="Consolas" panose="020B0609020204030204" pitchFamily="49" charset="0"/>
+                <a:latin typeface="Arial" panose="020B0604020202020204" pitchFamily="34" charset="0"/>
+                <a:cs typeface="Arial" panose="020B0604020202020204" pitchFamily="34" charset="0"/>
               </a:rPr>
-              <a:t>Failed assertions will generate a `AssertionError`</a:t>
-            </a:r>
-          </a:p>
-          <a:p>
-            <a:r>
-              <a:rPr lang="en-US" sz="2200" b="0">
+              <a:t>Failed assertions will generate a `</a:t>
+            </a:r>
+            <a:r>
+              <a:rPr lang="en-US" sz="2200" b="0" dirty="0" err="1">
                 <a:effectLst/>
-                <a:latin typeface="Consolas" panose="020B0609020204030204" pitchFamily="49" charset="0"/>
+                <a:latin typeface="Arial" panose="020B0604020202020204" pitchFamily="34" charset="0"/>
+                <a:cs typeface="Arial" panose="020B0604020202020204" pitchFamily="34" charset="0"/>
+              </a:rPr>
+              <a:t>AssertionError</a:t>
+            </a:r>
+            <a:r>
+              <a:rPr lang="en-US" sz="2200" b="0" dirty="0">
+                <a:effectLst/>
+                <a:latin typeface="Arial" panose="020B0604020202020204" pitchFamily="34" charset="0"/>
+                <a:cs typeface="Arial" panose="020B0604020202020204" pitchFamily="34" charset="0"/>
+              </a:rPr>
+              <a:t>`</a:t>
+            </a:r>
+          </a:p>
+          <a:p>
+            <a:r>
+              <a:rPr lang="en-US" sz="2200" b="0" dirty="0">
+                <a:effectLst/>
+                <a:latin typeface="Arial" panose="020B0604020202020204" pitchFamily="34" charset="0"/>
+                <a:cs typeface="Arial" panose="020B0604020202020204" pitchFamily="34" charset="0"/>
               </a:rPr>
               <a:t>Use pre-conditions to check that the inputs to a function are safe to use.</a:t>
             </a:r>
           </a:p>
           <a:p>
             <a:r>
-              <a:rPr lang="en-US" sz="2200" b="0">
+              <a:rPr lang="en-US" sz="2200" b="0" dirty="0">
                 <a:effectLst/>
-                <a:latin typeface="Consolas" panose="020B0609020204030204" pitchFamily="49" charset="0"/>
+                <a:latin typeface="Arial" panose="020B0604020202020204" pitchFamily="34" charset="0"/>
+                <a:cs typeface="Arial" panose="020B0604020202020204" pitchFamily="34" charset="0"/>
               </a:rPr>
               <a:t>Use post-conditions to check that the output from a function is safe to use.</a:t>
             </a:r>
           </a:p>
           <a:p>
-            <a:endParaRPr lang="en-GB" sz="2200"/>
+            <a:endParaRPr lang="en-GB" sz="2200" dirty="0">
+              <a:latin typeface="Arial" panose="020B0604020202020204" pitchFamily="34" charset="0"/>
+              <a:cs typeface="Arial" panose="020B0604020202020204" pitchFamily="34" charset="0"/>
+            </a:endParaRPr>
           </a:p>
         </p:txBody>
       </p:sp>
